--- a/dist/초4/국어/읽기와요약/초4_국어_읽기와요약_02_글의짜임_학생용.pptx
+++ b/dist/초4/국어/읽기와요약/초4_국어_읽기와요약_02_글의짜임_학생용.pptx
@@ -120,13 +120,13 @@
   <p:extLst>
     <p:ext uri="{521415D9-36F7-43E2-AB2F-B90AF26B5E84}">
       <p14:sectionLst xmlns:p14="http://schemas.microsoft.com/office/powerpoint/2010/main">
-        <p14:section name="도입" id="{02fe144c-55b0-ab0d-673c-e9c1b9bb7956}">
+        <p14:section name="도입" id="{db5ef84a-7aa5-df98-a3e6-233e6059477c}">
           <p14:sldIdLst>
             <p14:sldId id="256"/>
             <p14:sldId id="257"/>
           </p14:sldIdLst>
         </p14:section>
-        <p14:section name="개념" id="{4a78192a-c496-b79c-0a6d-7c743d5c979e}">
+        <p14:section name="개념" id="{0a38cffa-3468-162c-c07b-ac54a4772ffa}">
           <p14:sldIdLst>
             <p14:sldId id="258"/>
             <p14:sldId id="259"/>
@@ -136,24 +136,24 @@
             <p14:sldId id="263"/>
           </p14:sldIdLst>
         </p14:section>
-        <p14:section name="연습" id="{e6130d2e-1494-cbf2-1142-a6cf3413dfef}">
+        <p14:section name="연습" id="{59deeb48-9439-b170-10ab-094b40fb36ab}">
           <p14:sldIdLst>
             <p14:sldId id="264"/>
             <p14:sldId id="265"/>
           </p14:sldIdLst>
         </p14:section>
-        <p14:section name="확인" id="{2f15e7b8-d4b4-3534-bdab-e251a4661231}">
+        <p14:section name="확인" id="{38d07c9f-8fdf-80b2-0bae-2acd108c43d5}">
           <p14:sldIdLst>
             <p14:sldId id="266"/>
             <p14:sldId id="267"/>
           </p14:sldIdLst>
         </p14:section>
-        <p14:section name="정리" id="{e35e9e62-00ef-4fda-d61d-a1640cedf8a6}">
+        <p14:section name="정리" id="{5bdc1ccc-b854-cd52-5244-1e9e685ee1b6}">
           <p14:sldIdLst>
             <p14:sldId id="268"/>
           </p14:sldIdLst>
         </p14:section>
-        <p14:section name="보충" id="{fd5a2870-2260-9e60-229c-40e1adc59dcd}">
+        <p14:section name="보충" id="{561acf7a-7dda-c12b-b58d-fb7a63a4ff22}">
           <p14:sldIdLst>
             <p14:sldId id="269"/>
           </p14:sldIdLst>
@@ -7148,7 +7148,7 @@
           </p:nvPr>
         </p:nvGraphicFramePr>
         <p:xfrm>
-          <a:off x="1979676" y="2428240"/>
+          <a:off x="1979676" y="2463800"/>
           <a:ext cx="8229600" cy="914400"/>
         </p:xfrm>
         <a:graphic>
@@ -7160,7 +7160,7 @@
                 <a:gridCol w="2715768"/>
                 <a:gridCol w="2715768"/>
               </a:tblGrid>
-              <a:tr h="568960">
+              <a:tr h="551180">
                 <a:tc>
                   <a:txBody>
                     <a:bodyPr/>
@@ -7366,7 +7366,7 @@
                   </a:tcPr>
                 </a:tc>
               </a:tr>
-              <a:tr h="568960">
+              <a:tr h="551180">
                 <a:tc>
                   <a:txBody>
                     <a:bodyPr/>
@@ -7572,7 +7572,7 @@
                   </a:tcPr>
                 </a:tc>
               </a:tr>
-              <a:tr h="568960">
+              <a:tr h="551180">
                 <a:tc>
                   <a:txBody>
                     <a:bodyPr/>
@@ -7778,7 +7778,7 @@
                   </a:tcPr>
                 </a:tc>
               </a:tr>
-              <a:tr h="568960">
+              <a:tr h="551180">
                 <a:tc>
                   <a:txBody>
                     <a:bodyPr/>
